--- a/myfile.pptx
+++ b/myfile.pptx
@@ -3008,8 +3008,16 @@
           <a:lstStyle/>
           <a:p>
             <a:r>
+              <a:rPr lang="en-IN" dirty="0" err="1" smtClean="0"/>
+              <a:t>Bdbdhf</a:t>
+            </a:r>
+            <a:r>
+              <a:rPr lang="en-IN" dirty="0" smtClean="0"/>
+              <a:t> </a:t>
+            </a:r>
+            <a:r>
               <a:rPr lang="en-IN" smtClean="0"/>
-              <a:t>bdbdhf</a:t>
+              <a:t>vyvuvg</a:t>
             </a:r>
             <a:endParaRPr lang="en-IN"/>
           </a:p>

--- a/myfile.pptx
+++ b/myfile.pptx
@@ -3016,10 +3016,18 @@
               <a:t> </a:t>
             </a:r>
             <a:r>
+              <a:rPr lang="en-IN" dirty="0" err="1" smtClean="0"/>
+              <a:t>vyvuvg</a:t>
+            </a:r>
+            <a:r>
+              <a:rPr lang="en-IN" dirty="0" smtClean="0"/>
+              <a:t>  </a:t>
+            </a:r>
+            <a:r>
               <a:rPr lang="en-IN" smtClean="0"/>
-              <a:t>vyvuvg</a:t>
-            </a:r>
-            <a:endParaRPr lang="en-IN"/>
+              <a:t>fghrtj</a:t>
+            </a:r>
+            <a:endParaRPr lang="en-IN" dirty="0"/>
           </a:p>
         </p:txBody>
       </p:sp>

--- a/myfile.pptx
+++ b/myfile.pptx
@@ -2985,8 +2985,8 @@
           <a:lstStyle/>
           <a:p>
             <a:r>
-              <a:rPr lang="en-IN" dirty="0" smtClean="0"/>
-              <a:t>I’m dumb</a:t>
+              <a:rPr lang="en-IN" dirty="0" err="1" smtClean="0"/>
+              <a:t>jhbvsvvn</a:t>
             </a:r>
             <a:endParaRPr lang="en-IN" dirty="0"/>
           </a:p>
